--- a/docs/orbitas/orbita1/slides/pptx/orbita1_02_que_es_una_persona.pptx
+++ b/docs/orbitas/orbita1/slides/pptx/orbita1_02_que_es_una_persona.pptx
@@ -1213,7 +1213,7 @@
     <p:bg>
       <p:bgPr>
         <a:solidFill>
-          <a:srgbClr val="1A1A1A"/>
+          <a:srgbClr val="240509"/>
         </a:solidFill>
       </p:bgPr>
     </p:bg>
@@ -1278,7 +1278,7 @@
             <a:r>
               <a:rPr lang="en-US" sz="1400" b="1" dirty="0">
                 <a:solidFill>
-                  <a:srgbClr val="1A1A1A"/>
+                  <a:srgbClr val="240509"/>
                 </a:solidFill>
                 <a:latin typeface="Arial" pitchFamily="34" charset="0"/>
                 <a:ea typeface="Arial" pitchFamily="34" charset="-122"/>
@@ -1317,7 +1317,7 @@
             <a:r>
               <a:rPr lang="en-US" sz="4000" b="1" dirty="0">
                 <a:solidFill>
-                  <a:srgbClr val="FFFFFF"/>
+                  <a:srgbClr val="FBFBF8"/>
                 </a:solidFill>
                 <a:latin typeface="Arial" pitchFamily="34" charset="0"/>
                 <a:ea typeface="Arial" pitchFamily="34" charset="-122"/>
@@ -1356,7 +1356,7 @@
             <a:r>
               <a:rPr lang="en-US" sz="1800" dirty="0">
                 <a:solidFill>
-                  <a:srgbClr val="FFE156"/>
+                  <a:srgbClr val="F7D597"/>
                 </a:solidFill>
                 <a:latin typeface="Arial" pitchFamily="34" charset="0"/>
                 <a:ea typeface="Arial" pitchFamily="34" charset="-122"/>
@@ -1421,7 +1421,7 @@
     <p:bg>
       <p:bgPr>
         <a:solidFill>
-          <a:srgbClr val="FFFFFF"/>
+          <a:srgbClr val="FBFBF8"/>
         </a:solidFill>
       </p:bgPr>
     </p:bg>
@@ -1466,7 +1466,7 @@
             <a:r>
               <a:rPr lang="en-US" sz="2600" b="1" dirty="0">
                 <a:solidFill>
-                  <a:srgbClr val="1A1A1A"/>
+                  <a:srgbClr val="240509"/>
                 </a:solidFill>
                 <a:latin typeface="Arial" pitchFamily="34" charset="0"/>
                 <a:ea typeface="Arial" pitchFamily="34" charset="-122"/>
@@ -1525,7 +1525,7 @@
             <a:r>
               <a:rPr lang="en-US" sz="1800" b="1" dirty="0">
                 <a:solidFill>
-                  <a:srgbClr val="FFFFFF"/>
+                  <a:srgbClr val="FBFBF8"/>
                 </a:solidFill>
                 <a:latin typeface="Arial" pitchFamily="34" charset="0"/>
                 <a:ea typeface="Arial" pitchFamily="34" charset="-122"/>
@@ -1564,7 +1564,7 @@
             <a:r>
               <a:rPr lang="en-US" sz="1600" b="1" dirty="0">
                 <a:solidFill>
-                  <a:srgbClr val="1A1A1A"/>
+                  <a:srgbClr val="240509"/>
                 </a:solidFill>
                 <a:latin typeface="Arial" pitchFamily="34" charset="0"/>
                 <a:ea typeface="Arial" pitchFamily="34" charset="-122"/>
@@ -1603,7 +1603,7 @@
             <a:r>
               <a:rPr lang="en-US" sz="1300" dirty="0">
                 <a:solidFill>
-                  <a:srgbClr val="333333"/>
+                  <a:srgbClr val="4A5568"/>
                 </a:solidFill>
                 <a:latin typeface="Arial" pitchFamily="34" charset="0"/>
                 <a:ea typeface="Arial" pitchFamily="34" charset="-122"/>
@@ -1662,7 +1662,7 @@
             <a:r>
               <a:rPr lang="en-US" sz="1800" b="1" dirty="0">
                 <a:solidFill>
-                  <a:srgbClr val="FFFFFF"/>
+                  <a:srgbClr val="FBFBF8"/>
                 </a:solidFill>
                 <a:latin typeface="Arial" pitchFamily="34" charset="0"/>
                 <a:ea typeface="Arial" pitchFamily="34" charset="-122"/>
@@ -1701,7 +1701,7 @@
             <a:r>
               <a:rPr lang="en-US" sz="1600" b="1" dirty="0">
                 <a:solidFill>
-                  <a:srgbClr val="1A1A1A"/>
+                  <a:srgbClr val="240509"/>
                 </a:solidFill>
                 <a:latin typeface="Arial" pitchFamily="34" charset="0"/>
                 <a:ea typeface="Arial" pitchFamily="34" charset="-122"/>
@@ -1740,7 +1740,7 @@
             <a:r>
               <a:rPr lang="en-US" sz="1300" dirty="0">
                 <a:solidFill>
-                  <a:srgbClr val="333333"/>
+                  <a:srgbClr val="4A5568"/>
                 </a:solidFill>
                 <a:latin typeface="Arial" pitchFamily="34" charset="0"/>
                 <a:ea typeface="Arial" pitchFamily="34" charset="-122"/>
@@ -1799,7 +1799,7 @@
             <a:r>
               <a:rPr lang="en-US" sz="1800" b="1" dirty="0">
                 <a:solidFill>
-                  <a:srgbClr val="FFFFFF"/>
+                  <a:srgbClr val="FBFBF8"/>
                 </a:solidFill>
                 <a:latin typeface="Arial" pitchFamily="34" charset="0"/>
                 <a:ea typeface="Arial" pitchFamily="34" charset="-122"/>
@@ -1838,7 +1838,7 @@
             <a:r>
               <a:rPr lang="en-US" sz="1600" b="1" dirty="0">
                 <a:solidFill>
-                  <a:srgbClr val="1A1A1A"/>
+                  <a:srgbClr val="240509"/>
                 </a:solidFill>
                 <a:latin typeface="Arial" pitchFamily="34" charset="0"/>
                 <a:ea typeface="Arial" pitchFamily="34" charset="-122"/>
@@ -1877,7 +1877,7 @@
             <a:r>
               <a:rPr lang="en-US" sz="1300" dirty="0">
                 <a:solidFill>
-                  <a:srgbClr val="333333"/>
+                  <a:srgbClr val="4A5568"/>
                 </a:solidFill>
                 <a:latin typeface="Arial" pitchFamily="34" charset="0"/>
                 <a:ea typeface="Arial" pitchFamily="34" charset="-122"/>
@@ -1903,7 +1903,7 @@
     <p:bg>
       <p:bgPr>
         <a:solidFill>
-          <a:srgbClr val="FFFFFF"/>
+          <a:srgbClr val="FBFBF8"/>
         </a:solidFill>
       </p:bgPr>
     </p:bg>
@@ -1948,7 +1948,7 @@
             <a:r>
               <a:rPr lang="en-US" sz="2600" b="1" dirty="0">
                 <a:solidFill>
-                  <a:srgbClr val="1A1A1A"/>
+                  <a:srgbClr val="240509"/>
                 </a:solidFill>
                 <a:latin typeface="Arial" pitchFamily="34" charset="0"/>
                 <a:ea typeface="Arial" pitchFamily="34" charset="-122"/>
@@ -2007,7 +2007,7 @@
             <a:r>
               <a:rPr lang="en-US" sz="1800" b="1" dirty="0">
                 <a:solidFill>
-                  <a:srgbClr val="FFFFFF"/>
+                  <a:srgbClr val="FBFBF8"/>
                 </a:solidFill>
                 <a:latin typeface="Arial" pitchFamily="34" charset="0"/>
                 <a:ea typeface="Arial" pitchFamily="34" charset="-122"/>
@@ -2046,7 +2046,7 @@
             <a:r>
               <a:rPr lang="en-US" sz="1600" b="1" dirty="0">
                 <a:solidFill>
-                  <a:srgbClr val="1A1A1A"/>
+                  <a:srgbClr val="240509"/>
                 </a:solidFill>
                 <a:latin typeface="Arial" pitchFamily="34" charset="0"/>
                 <a:ea typeface="Arial" pitchFamily="34" charset="-122"/>
@@ -2085,7 +2085,7 @@
             <a:r>
               <a:rPr lang="en-US" sz="1300" dirty="0">
                 <a:solidFill>
-                  <a:srgbClr val="333333"/>
+                  <a:srgbClr val="4A5568"/>
                 </a:solidFill>
                 <a:latin typeface="Arial" pitchFamily="34" charset="0"/>
                 <a:ea typeface="Arial" pitchFamily="34" charset="-122"/>
@@ -2144,7 +2144,7 @@
             <a:r>
               <a:rPr lang="en-US" sz="1800" b="1" dirty="0">
                 <a:solidFill>
-                  <a:srgbClr val="FFFFFF"/>
+                  <a:srgbClr val="FBFBF8"/>
                 </a:solidFill>
                 <a:latin typeface="Arial" pitchFamily="34" charset="0"/>
                 <a:ea typeface="Arial" pitchFamily="34" charset="-122"/>
@@ -2183,7 +2183,7 @@
             <a:r>
               <a:rPr lang="en-US" sz="1600" b="1" dirty="0">
                 <a:solidFill>
-                  <a:srgbClr val="1A1A1A"/>
+                  <a:srgbClr val="240509"/>
                 </a:solidFill>
                 <a:latin typeface="Arial" pitchFamily="34" charset="0"/>
                 <a:ea typeface="Arial" pitchFamily="34" charset="-122"/>
@@ -2222,7 +2222,7 @@
             <a:r>
               <a:rPr lang="en-US" sz="1300" dirty="0">
                 <a:solidFill>
-                  <a:srgbClr val="333333"/>
+                  <a:srgbClr val="4A5568"/>
                 </a:solidFill>
                 <a:latin typeface="Arial" pitchFamily="34" charset="0"/>
                 <a:ea typeface="Arial" pitchFamily="34" charset="-122"/>
@@ -2281,7 +2281,7 @@
             <a:r>
               <a:rPr lang="en-US" sz="1800" b="1" dirty="0">
                 <a:solidFill>
-                  <a:srgbClr val="FFFFFF"/>
+                  <a:srgbClr val="FBFBF8"/>
                 </a:solidFill>
                 <a:latin typeface="Arial" pitchFamily="34" charset="0"/>
                 <a:ea typeface="Arial" pitchFamily="34" charset="-122"/>
@@ -2320,7 +2320,7 @@
             <a:r>
               <a:rPr lang="en-US" sz="1600" b="1" dirty="0">
                 <a:solidFill>
-                  <a:srgbClr val="1A1A1A"/>
+                  <a:srgbClr val="240509"/>
                 </a:solidFill>
                 <a:latin typeface="Arial" pitchFamily="34" charset="0"/>
                 <a:ea typeface="Arial" pitchFamily="34" charset="-122"/>
@@ -2359,7 +2359,7 @@
             <a:r>
               <a:rPr lang="en-US" sz="1300" dirty="0">
                 <a:solidFill>
-                  <a:srgbClr val="333333"/>
+                  <a:srgbClr val="4A5568"/>
                 </a:solidFill>
                 <a:latin typeface="Arial" pitchFamily="34" charset="0"/>
                 <a:ea typeface="Arial" pitchFamily="34" charset="-122"/>
@@ -2385,7 +2385,7 @@
     <p:bg>
       <p:bgPr>
         <a:solidFill>
-          <a:srgbClr val="FFFFFF"/>
+          <a:srgbClr val="FBFBF8"/>
         </a:solidFill>
       </p:bgPr>
     </p:bg>
@@ -2430,7 +2430,7 @@
             <a:r>
               <a:rPr lang="en-US" sz="2600" b="1" dirty="0">
                 <a:solidFill>
-                  <a:srgbClr val="1A1A1A"/>
+                  <a:srgbClr val="240509"/>
                 </a:solidFill>
                 <a:latin typeface="Arial" pitchFamily="34" charset="0"/>
                 <a:ea typeface="Arial" pitchFamily="34" charset="-122"/>
@@ -2489,7 +2489,7 @@
             <a:r>
               <a:rPr lang="en-US" sz="1800" b="1" dirty="0">
                 <a:solidFill>
-                  <a:srgbClr val="FFFFFF"/>
+                  <a:srgbClr val="FBFBF8"/>
                 </a:solidFill>
                 <a:latin typeface="Arial" pitchFamily="34" charset="0"/>
                 <a:ea typeface="Arial" pitchFamily="34" charset="-122"/>
@@ -2528,7 +2528,7 @@
             <a:r>
               <a:rPr lang="en-US" sz="1600" b="1" dirty="0">
                 <a:solidFill>
-                  <a:srgbClr val="1A1A1A"/>
+                  <a:srgbClr val="240509"/>
                 </a:solidFill>
                 <a:latin typeface="Arial" pitchFamily="34" charset="0"/>
                 <a:ea typeface="Arial" pitchFamily="34" charset="-122"/>
@@ -2567,7 +2567,7 @@
             <a:r>
               <a:rPr lang="en-US" sz="1300" dirty="0">
                 <a:solidFill>
-                  <a:srgbClr val="333333"/>
+                  <a:srgbClr val="4A5568"/>
                 </a:solidFill>
                 <a:latin typeface="Arial" pitchFamily="34" charset="0"/>
                 <a:ea typeface="Arial" pitchFamily="34" charset="-122"/>
@@ -2626,7 +2626,7 @@
             <a:r>
               <a:rPr lang="en-US" sz="1800" b="1" dirty="0">
                 <a:solidFill>
-                  <a:srgbClr val="FFFFFF"/>
+                  <a:srgbClr val="FBFBF8"/>
                 </a:solidFill>
                 <a:latin typeface="Arial" pitchFamily="34" charset="0"/>
                 <a:ea typeface="Arial" pitchFamily="34" charset="-122"/>
@@ -2665,7 +2665,7 @@
             <a:r>
               <a:rPr lang="en-US" sz="1600" b="1" dirty="0">
                 <a:solidFill>
-                  <a:srgbClr val="1A1A1A"/>
+                  <a:srgbClr val="240509"/>
                 </a:solidFill>
                 <a:latin typeface="Arial" pitchFamily="34" charset="0"/>
                 <a:ea typeface="Arial" pitchFamily="34" charset="-122"/>
@@ -2704,7 +2704,7 @@
             <a:r>
               <a:rPr lang="en-US" sz="1300" dirty="0">
                 <a:solidFill>
-                  <a:srgbClr val="333333"/>
+                  <a:srgbClr val="4A5568"/>
                 </a:solidFill>
                 <a:latin typeface="Arial" pitchFamily="34" charset="0"/>
                 <a:ea typeface="Arial" pitchFamily="34" charset="-122"/>
@@ -2775,7 +2775,7 @@
             <a:r>
               <a:rPr lang="en-US" sz="1600" b="1" dirty="0">
                 <a:solidFill>
-                  <a:srgbClr val="1A1A1A"/>
+                  <a:srgbClr val="240509"/>
                 </a:solidFill>
                 <a:latin typeface="Arial" pitchFamily="34" charset="0"/>
                 <a:ea typeface="Arial" pitchFamily="34" charset="-122"/>
@@ -2814,7 +2814,7 @@
             <a:r>
               <a:rPr lang="en-US" sz="2400" b="1" dirty="0">
                 <a:solidFill>
-                  <a:srgbClr val="FFFFFF"/>
+                  <a:srgbClr val="FBFBF8"/>
                 </a:solidFill>
                 <a:latin typeface="Arial" pitchFamily="34" charset="0"/>
                 <a:ea typeface="Arial" pitchFamily="34" charset="-122"/>

--- a/docs/orbitas/orbita1/slides/pptx/orbita1_02_que_es_una_persona.pptx
+++ b/docs/orbitas/orbita1/slides/pptx/orbita1_02_que_es_una_persona.pptx
@@ -1213,7 +1213,7 @@
     <p:bg>
       <p:bgPr>
         <a:solidFill>
-          <a:srgbClr val="240509"/>
+          <a:srgbClr val="1F0318"/>
         </a:solidFill>
       </p:bgPr>
     </p:bg>
@@ -1278,7 +1278,7 @@
             <a:r>
               <a:rPr lang="en-US" sz="1400" b="1" dirty="0">
                 <a:solidFill>
-                  <a:srgbClr val="240509"/>
+                  <a:srgbClr val="1F0318"/>
                 </a:solidFill>
                 <a:latin typeface="Arial" pitchFamily="34" charset="0"/>
                 <a:ea typeface="Arial" pitchFamily="34" charset="-122"/>
@@ -1317,7 +1317,7 @@
             <a:r>
               <a:rPr lang="en-US" sz="4000" b="1" dirty="0">
                 <a:solidFill>
-                  <a:srgbClr val="FBFBF8"/>
+                  <a:srgbClr val="FFFFFF"/>
                 </a:solidFill>
                 <a:latin typeface="Arial" pitchFamily="34" charset="0"/>
                 <a:ea typeface="Arial" pitchFamily="34" charset="-122"/>
@@ -1356,7 +1356,7 @@
             <a:r>
               <a:rPr lang="en-US" sz="1800" dirty="0">
                 <a:solidFill>
-                  <a:srgbClr val="F7D597"/>
+                  <a:srgbClr val="FFB8DE"/>
                 </a:solidFill>
                 <a:latin typeface="Arial" pitchFamily="34" charset="0"/>
                 <a:ea typeface="Arial" pitchFamily="34" charset="-122"/>
@@ -1421,7 +1421,7 @@
     <p:bg>
       <p:bgPr>
         <a:solidFill>
-          <a:srgbClr val="FBFBF8"/>
+          <a:srgbClr val="FFFFFF"/>
         </a:solidFill>
       </p:bgPr>
     </p:bg>
@@ -1466,7 +1466,7 @@
             <a:r>
               <a:rPr lang="en-US" sz="2600" b="1" dirty="0">
                 <a:solidFill>
-                  <a:srgbClr val="240509"/>
+                  <a:srgbClr val="1F0318"/>
                 </a:solidFill>
                 <a:latin typeface="Arial" pitchFamily="34" charset="0"/>
                 <a:ea typeface="Arial" pitchFamily="34" charset="-122"/>
@@ -1525,7 +1525,7 @@
             <a:r>
               <a:rPr lang="en-US" sz="1800" b="1" dirty="0">
                 <a:solidFill>
-                  <a:srgbClr val="FBFBF8"/>
+                  <a:srgbClr val="FFFFFF"/>
                 </a:solidFill>
                 <a:latin typeface="Arial" pitchFamily="34" charset="0"/>
                 <a:ea typeface="Arial" pitchFamily="34" charset="-122"/>
@@ -1564,7 +1564,7 @@
             <a:r>
               <a:rPr lang="en-US" sz="1600" b="1" dirty="0">
                 <a:solidFill>
-                  <a:srgbClr val="240509"/>
+                  <a:srgbClr val="1F0318"/>
                 </a:solidFill>
                 <a:latin typeface="Arial" pitchFamily="34" charset="0"/>
                 <a:ea typeface="Arial" pitchFamily="34" charset="-122"/>
@@ -1662,7 +1662,7 @@
             <a:r>
               <a:rPr lang="en-US" sz="1800" b="1" dirty="0">
                 <a:solidFill>
-                  <a:srgbClr val="FBFBF8"/>
+                  <a:srgbClr val="FFFFFF"/>
                 </a:solidFill>
                 <a:latin typeface="Arial" pitchFamily="34" charset="0"/>
                 <a:ea typeface="Arial" pitchFamily="34" charset="-122"/>
@@ -1701,7 +1701,7 @@
             <a:r>
               <a:rPr lang="en-US" sz="1600" b="1" dirty="0">
                 <a:solidFill>
-                  <a:srgbClr val="240509"/>
+                  <a:srgbClr val="1F0318"/>
                 </a:solidFill>
                 <a:latin typeface="Arial" pitchFamily="34" charset="0"/>
                 <a:ea typeface="Arial" pitchFamily="34" charset="-122"/>
@@ -1799,7 +1799,7 @@
             <a:r>
               <a:rPr lang="en-US" sz="1800" b="1" dirty="0">
                 <a:solidFill>
-                  <a:srgbClr val="FBFBF8"/>
+                  <a:srgbClr val="FFFFFF"/>
                 </a:solidFill>
                 <a:latin typeface="Arial" pitchFamily="34" charset="0"/>
                 <a:ea typeface="Arial" pitchFamily="34" charset="-122"/>
@@ -1838,7 +1838,7 @@
             <a:r>
               <a:rPr lang="en-US" sz="1600" b="1" dirty="0">
                 <a:solidFill>
-                  <a:srgbClr val="240509"/>
+                  <a:srgbClr val="1F0318"/>
                 </a:solidFill>
                 <a:latin typeface="Arial" pitchFamily="34" charset="0"/>
                 <a:ea typeface="Arial" pitchFamily="34" charset="-122"/>
@@ -1903,7 +1903,7 @@
     <p:bg>
       <p:bgPr>
         <a:solidFill>
-          <a:srgbClr val="FBFBF8"/>
+          <a:srgbClr val="FFFFFF"/>
         </a:solidFill>
       </p:bgPr>
     </p:bg>
@@ -1948,7 +1948,7 @@
             <a:r>
               <a:rPr lang="en-US" sz="2600" b="1" dirty="0">
                 <a:solidFill>
-                  <a:srgbClr val="240509"/>
+                  <a:srgbClr val="1F0318"/>
                 </a:solidFill>
                 <a:latin typeface="Arial" pitchFamily="34" charset="0"/>
                 <a:ea typeface="Arial" pitchFamily="34" charset="-122"/>
@@ -2007,7 +2007,7 @@
             <a:r>
               <a:rPr lang="en-US" sz="1800" b="1" dirty="0">
                 <a:solidFill>
-                  <a:srgbClr val="FBFBF8"/>
+                  <a:srgbClr val="FFFFFF"/>
                 </a:solidFill>
                 <a:latin typeface="Arial" pitchFamily="34" charset="0"/>
                 <a:ea typeface="Arial" pitchFamily="34" charset="-122"/>
@@ -2046,7 +2046,7 @@
             <a:r>
               <a:rPr lang="en-US" sz="1600" b="1" dirty="0">
                 <a:solidFill>
-                  <a:srgbClr val="240509"/>
+                  <a:srgbClr val="1F0318"/>
                 </a:solidFill>
                 <a:latin typeface="Arial" pitchFamily="34" charset="0"/>
                 <a:ea typeface="Arial" pitchFamily="34" charset="-122"/>
@@ -2144,7 +2144,7 @@
             <a:r>
               <a:rPr lang="en-US" sz="1800" b="1" dirty="0">
                 <a:solidFill>
-                  <a:srgbClr val="FBFBF8"/>
+                  <a:srgbClr val="FFFFFF"/>
                 </a:solidFill>
                 <a:latin typeface="Arial" pitchFamily="34" charset="0"/>
                 <a:ea typeface="Arial" pitchFamily="34" charset="-122"/>
@@ -2183,7 +2183,7 @@
             <a:r>
               <a:rPr lang="en-US" sz="1600" b="1" dirty="0">
                 <a:solidFill>
-                  <a:srgbClr val="240509"/>
+                  <a:srgbClr val="1F0318"/>
                 </a:solidFill>
                 <a:latin typeface="Arial" pitchFamily="34" charset="0"/>
                 <a:ea typeface="Arial" pitchFamily="34" charset="-122"/>
@@ -2281,7 +2281,7 @@
             <a:r>
               <a:rPr lang="en-US" sz="1800" b="1" dirty="0">
                 <a:solidFill>
-                  <a:srgbClr val="FBFBF8"/>
+                  <a:srgbClr val="FFFFFF"/>
                 </a:solidFill>
                 <a:latin typeface="Arial" pitchFamily="34" charset="0"/>
                 <a:ea typeface="Arial" pitchFamily="34" charset="-122"/>
@@ -2320,7 +2320,7 @@
             <a:r>
               <a:rPr lang="en-US" sz="1600" b="1" dirty="0">
                 <a:solidFill>
-                  <a:srgbClr val="240509"/>
+                  <a:srgbClr val="1F0318"/>
                 </a:solidFill>
                 <a:latin typeface="Arial" pitchFamily="34" charset="0"/>
                 <a:ea typeface="Arial" pitchFamily="34" charset="-122"/>
@@ -2385,7 +2385,7 @@
     <p:bg>
       <p:bgPr>
         <a:solidFill>
-          <a:srgbClr val="FBFBF8"/>
+          <a:srgbClr val="FFFFFF"/>
         </a:solidFill>
       </p:bgPr>
     </p:bg>
@@ -2430,7 +2430,7 @@
             <a:r>
               <a:rPr lang="en-US" sz="2600" b="1" dirty="0">
                 <a:solidFill>
-                  <a:srgbClr val="240509"/>
+                  <a:srgbClr val="1F0318"/>
                 </a:solidFill>
                 <a:latin typeface="Arial" pitchFamily="34" charset="0"/>
                 <a:ea typeface="Arial" pitchFamily="34" charset="-122"/>
@@ -2489,7 +2489,7 @@
             <a:r>
               <a:rPr lang="en-US" sz="1800" b="1" dirty="0">
                 <a:solidFill>
-                  <a:srgbClr val="FBFBF8"/>
+                  <a:srgbClr val="FFFFFF"/>
                 </a:solidFill>
                 <a:latin typeface="Arial" pitchFamily="34" charset="0"/>
                 <a:ea typeface="Arial" pitchFamily="34" charset="-122"/>
@@ -2528,7 +2528,7 @@
             <a:r>
               <a:rPr lang="en-US" sz="1600" b="1" dirty="0">
                 <a:solidFill>
-                  <a:srgbClr val="240509"/>
+                  <a:srgbClr val="1F0318"/>
                 </a:solidFill>
                 <a:latin typeface="Arial" pitchFamily="34" charset="0"/>
                 <a:ea typeface="Arial" pitchFamily="34" charset="-122"/>
@@ -2626,7 +2626,7 @@
             <a:r>
               <a:rPr lang="en-US" sz="1800" b="1" dirty="0">
                 <a:solidFill>
-                  <a:srgbClr val="FBFBF8"/>
+                  <a:srgbClr val="FFFFFF"/>
                 </a:solidFill>
                 <a:latin typeface="Arial" pitchFamily="34" charset="0"/>
                 <a:ea typeface="Arial" pitchFamily="34" charset="-122"/>
@@ -2665,7 +2665,7 @@
             <a:r>
               <a:rPr lang="en-US" sz="1600" b="1" dirty="0">
                 <a:solidFill>
-                  <a:srgbClr val="240509"/>
+                  <a:srgbClr val="1F0318"/>
                 </a:solidFill>
                 <a:latin typeface="Arial" pitchFamily="34" charset="0"/>
                 <a:ea typeface="Arial" pitchFamily="34" charset="-122"/>
@@ -2775,7 +2775,7 @@
             <a:r>
               <a:rPr lang="en-US" sz="1600" b="1" dirty="0">
                 <a:solidFill>
-                  <a:srgbClr val="240509"/>
+                  <a:srgbClr val="1F0318"/>
                 </a:solidFill>
                 <a:latin typeface="Arial" pitchFamily="34" charset="0"/>
                 <a:ea typeface="Arial" pitchFamily="34" charset="-122"/>
@@ -2814,7 +2814,7 @@
             <a:r>
               <a:rPr lang="en-US" sz="2400" b="1" dirty="0">
                 <a:solidFill>
-                  <a:srgbClr val="FBFBF8"/>
+                  <a:srgbClr val="FFFFFF"/>
                 </a:solidFill>
                 <a:latin typeface="Arial" pitchFamily="34" charset="0"/>
                 <a:ea typeface="Arial" pitchFamily="34" charset="-122"/>

--- a/docs/orbitas/orbita1/slides/pptx/orbita1_02_que_es_una_persona.pptx
+++ b/docs/orbitas/orbita1/slides/pptx/orbita1_02_que_es_una_persona.pptx
@@ -1362,7 +1362,7 @@
                 <a:ea typeface="Arial" pitchFamily="34" charset="-122"/>
                 <a:cs typeface="Arial" pitchFamily="34" charset="-120"/>
               </a:rPr>
-              <a:t>Una persona es una síntesis de investigación real, no un personaje inventado</a:t>
+              <a:t>Una persona es una síntesis de investigación real, respaldada por datos concretos</a:t>
             </a:r>
             <a:endParaRPr lang="en-US" sz="1800" dirty="0"/>
           </a:p>

--- a/docs/orbitas/orbita1/slides/pptx/orbita1_02_que_es_una_persona.pptx
+++ b/docs/orbitas/orbita1/slides/pptx/orbita1_02_que_es_una_persona.pptx
@@ -10,9 +10,12 @@
     <p:sldId id="258" r:id="rId4"/>
     <p:sldId id="259" r:id="rId5"/>
     <p:sldId id="260" r:id="rId6"/>
+    <p:sldId id="261" r:id="rId7"/>
+    <p:sldId id="262" r:id="rId8"/>
+    <p:sldId id="263" r:id="rId9"/>
   </p:sldIdLst>
   <p:notesMasterIdLst>
-    <p:notesMasterId r:id="rId7"/>
+    <p:notesMasterId r:id="rId10"/>
   </p:notesMasterIdLst>
   <p:sldSz cx="12192000" cy="6858000"/>
   <p:notesSz cx="6858000" cy="12192000"/>
@@ -882,6 +885,270 @@
             <a:fld id="{F7021451-1387-4CA6-816F-3879F97B5CBC}" type="slidenum">
               <a:rPr lang="en-US"/>
               <a:t>5</a:t>
+            </a:fld>
+            <a:endParaRPr lang="en-US"/>
+          </a:p>
+        </p:txBody>
+      </p:sp>
+    </p:spTree>
+    <p:extLst>
+      <p:ext uri="{BB962C8B-B14F-4D97-AF65-F5344CB8AC3E}">
+        <p14:creationId xmlns:p14="http://schemas.microsoft.com/office/powerpoint/2010/main" val="1024086991"/>
+      </p:ext>
+    </p:extLst>
+  </p:cSld>
+  <p:clrMapOvr>
+    <a:masterClrMapping/>
+  </p:clrMapOvr>
+</p:notes>
+</file>
+
+<file path=ppt/notesSlides/notesSlide6.xml><?xml version="1.0" encoding="utf-8"?>
+<p:notes xmlns:a="http://schemas.openxmlformats.org/drawingml/2006/main" xmlns:r="http://schemas.openxmlformats.org/officeDocument/2006/relationships" xmlns:p="http://schemas.openxmlformats.org/presentationml/2006/main">
+  <p:cSld>
+    <p:spTree>
+      <p:nvGrpSpPr>
+        <p:cNvPr id="1" name=""/>
+        <p:cNvGrpSpPr/>
+        <p:nvPr/>
+      </p:nvGrpSpPr>
+      <p:grpSpPr>
+        <a:xfrm>
+          <a:off x="0" y="0"/>
+          <a:ext cx="0" cy="0"/>
+          <a:chOff x="0" y="0"/>
+          <a:chExt cx="0" cy="0"/>
+        </a:xfrm>
+      </p:grpSpPr>
+      <p:sp>
+        <p:nvSpPr>
+          <p:cNvPr id="2" name="Slide Image Placeholder 1"/>
+          <p:cNvSpPr>
+            <a:spLocks noGrp="1" noRot="1" noChangeAspect="1"/>
+          </p:cNvSpPr>
+          <p:nvPr>
+            <p:ph type="sldImg"/>
+          </p:nvPr>
+        </p:nvSpPr>
+        <p:spPr/>
+      </p:sp>
+      <p:sp>
+        <p:nvSpPr>
+          <p:cNvPr id="3" name="Notes Placeholder 2"/>
+          <p:cNvSpPr>
+            <a:spLocks noGrp="1"/>
+          </p:cNvSpPr>
+          <p:nvPr>
+            <p:ph type="body" idx="1"/>
+          </p:nvPr>
+        </p:nvSpPr>
+        <p:spPr/>
+        <p:txBody>
+          <a:bodyPr/>
+          <a:lstStyle/>
+          <a:p>
+            <a:r>
+              <a:rPr lang="en-US" dirty="0"/>
+              <a:t/>
+            </a:r>
+            <a:endParaRPr lang="en-US" dirty="0"/>
+          </a:p>
+        </p:txBody>
+      </p:sp>
+      <p:sp>
+        <p:nvSpPr>
+          <p:cNvPr id="4" name="Slide Number Placeholder 3"/>
+          <p:cNvSpPr>
+            <a:spLocks noGrp="1"/>
+          </p:cNvSpPr>
+          <p:nvPr>
+            <p:ph type="sldNum" sz="quarter" idx="10"/>
+          </p:nvPr>
+        </p:nvSpPr>
+        <p:spPr/>
+        <p:txBody>
+          <a:bodyPr/>
+          <a:lstStyle/>
+          <a:p>
+            <a:fld id="{F7021451-1387-4CA6-816F-3879F97B5CBC}" type="slidenum">
+              <a:rPr lang="en-US"/>
+              <a:t>6</a:t>
+            </a:fld>
+            <a:endParaRPr lang="en-US"/>
+          </a:p>
+        </p:txBody>
+      </p:sp>
+    </p:spTree>
+    <p:extLst>
+      <p:ext uri="{BB962C8B-B14F-4D97-AF65-F5344CB8AC3E}">
+        <p14:creationId xmlns:p14="http://schemas.microsoft.com/office/powerpoint/2010/main" val="1024086991"/>
+      </p:ext>
+    </p:extLst>
+  </p:cSld>
+  <p:clrMapOvr>
+    <a:masterClrMapping/>
+  </p:clrMapOvr>
+</p:notes>
+</file>
+
+<file path=ppt/notesSlides/notesSlide7.xml><?xml version="1.0" encoding="utf-8"?>
+<p:notes xmlns:a="http://schemas.openxmlformats.org/drawingml/2006/main" xmlns:r="http://schemas.openxmlformats.org/officeDocument/2006/relationships" xmlns:p="http://schemas.openxmlformats.org/presentationml/2006/main">
+  <p:cSld>
+    <p:spTree>
+      <p:nvGrpSpPr>
+        <p:cNvPr id="1" name=""/>
+        <p:cNvGrpSpPr/>
+        <p:nvPr/>
+      </p:nvGrpSpPr>
+      <p:grpSpPr>
+        <a:xfrm>
+          <a:off x="0" y="0"/>
+          <a:ext cx="0" cy="0"/>
+          <a:chOff x="0" y="0"/>
+          <a:chExt cx="0" cy="0"/>
+        </a:xfrm>
+      </p:grpSpPr>
+      <p:sp>
+        <p:nvSpPr>
+          <p:cNvPr id="2" name="Slide Image Placeholder 1"/>
+          <p:cNvSpPr>
+            <a:spLocks noGrp="1" noRot="1" noChangeAspect="1"/>
+          </p:cNvSpPr>
+          <p:nvPr>
+            <p:ph type="sldImg"/>
+          </p:nvPr>
+        </p:nvSpPr>
+        <p:spPr/>
+      </p:sp>
+      <p:sp>
+        <p:nvSpPr>
+          <p:cNvPr id="3" name="Notes Placeholder 2"/>
+          <p:cNvSpPr>
+            <a:spLocks noGrp="1"/>
+          </p:cNvSpPr>
+          <p:nvPr>
+            <p:ph type="body" idx="1"/>
+          </p:nvPr>
+        </p:nvSpPr>
+        <p:spPr/>
+        <p:txBody>
+          <a:bodyPr/>
+          <a:lstStyle/>
+          <a:p>
+            <a:r>
+              <a:rPr lang="en-US" dirty="0"/>
+              <a:t/>
+            </a:r>
+            <a:endParaRPr lang="en-US" dirty="0"/>
+          </a:p>
+        </p:txBody>
+      </p:sp>
+      <p:sp>
+        <p:nvSpPr>
+          <p:cNvPr id="4" name="Slide Number Placeholder 3"/>
+          <p:cNvSpPr>
+            <a:spLocks noGrp="1"/>
+          </p:cNvSpPr>
+          <p:nvPr>
+            <p:ph type="sldNum" sz="quarter" idx="10"/>
+          </p:nvPr>
+        </p:nvSpPr>
+        <p:spPr/>
+        <p:txBody>
+          <a:bodyPr/>
+          <a:lstStyle/>
+          <a:p>
+            <a:fld id="{F7021451-1387-4CA6-816F-3879F97B5CBC}" type="slidenum">
+              <a:rPr lang="en-US"/>
+              <a:t>7</a:t>
+            </a:fld>
+            <a:endParaRPr lang="en-US"/>
+          </a:p>
+        </p:txBody>
+      </p:sp>
+    </p:spTree>
+    <p:extLst>
+      <p:ext uri="{BB962C8B-B14F-4D97-AF65-F5344CB8AC3E}">
+        <p14:creationId xmlns:p14="http://schemas.microsoft.com/office/powerpoint/2010/main" val="1024086991"/>
+      </p:ext>
+    </p:extLst>
+  </p:cSld>
+  <p:clrMapOvr>
+    <a:masterClrMapping/>
+  </p:clrMapOvr>
+</p:notes>
+</file>
+
+<file path=ppt/notesSlides/notesSlide8.xml><?xml version="1.0" encoding="utf-8"?>
+<p:notes xmlns:a="http://schemas.openxmlformats.org/drawingml/2006/main" xmlns:r="http://schemas.openxmlformats.org/officeDocument/2006/relationships" xmlns:p="http://schemas.openxmlformats.org/presentationml/2006/main">
+  <p:cSld>
+    <p:spTree>
+      <p:nvGrpSpPr>
+        <p:cNvPr id="1" name=""/>
+        <p:cNvGrpSpPr/>
+        <p:nvPr/>
+      </p:nvGrpSpPr>
+      <p:grpSpPr>
+        <a:xfrm>
+          <a:off x="0" y="0"/>
+          <a:ext cx="0" cy="0"/>
+          <a:chOff x="0" y="0"/>
+          <a:chExt cx="0" cy="0"/>
+        </a:xfrm>
+      </p:grpSpPr>
+      <p:sp>
+        <p:nvSpPr>
+          <p:cNvPr id="2" name="Slide Image Placeholder 1"/>
+          <p:cNvSpPr>
+            <a:spLocks noGrp="1" noRot="1" noChangeAspect="1"/>
+          </p:cNvSpPr>
+          <p:nvPr>
+            <p:ph type="sldImg"/>
+          </p:nvPr>
+        </p:nvSpPr>
+        <p:spPr/>
+      </p:sp>
+      <p:sp>
+        <p:nvSpPr>
+          <p:cNvPr id="3" name="Notes Placeholder 2"/>
+          <p:cNvSpPr>
+            <a:spLocks noGrp="1"/>
+          </p:cNvSpPr>
+          <p:nvPr>
+            <p:ph type="body" idx="1"/>
+          </p:nvPr>
+        </p:nvSpPr>
+        <p:spPr/>
+        <p:txBody>
+          <a:bodyPr/>
+          <a:lstStyle/>
+          <a:p>
+            <a:r>
+              <a:rPr lang="en-US" dirty="0"/>
+              <a:t/>
+            </a:r>
+            <a:endParaRPr lang="en-US" dirty="0"/>
+          </a:p>
+        </p:txBody>
+      </p:sp>
+      <p:sp>
+        <p:nvSpPr>
+          <p:cNvPr id="4" name="Slide Number Placeholder 3"/>
+          <p:cNvSpPr>
+            <a:spLocks noGrp="1"/>
+          </p:cNvSpPr>
+          <p:nvPr>
+            <p:ph type="sldNum" sz="quarter" idx="10"/>
+          </p:nvPr>
+        </p:nvSpPr>
+        <p:spPr/>
+        <p:txBody>
+          <a:bodyPr/>
+          <a:lstStyle/>
+          <a:p>
+            <a:fld id="{F7021451-1387-4CA6-816F-3879F97B5CBC}" type="slidenum">
+              <a:rPr lang="en-US"/>
+              <a:t>8</a:t>
             </a:fld>
             <a:endParaRPr lang="en-US"/>
           </a:p>
@@ -1323,7 +1590,7 @@
                 <a:ea typeface="Arial" pitchFamily="34" charset="-122"/>
                 <a:cs typeface="Arial" pitchFamily="34" charset="-120"/>
               </a:rPr>
-              <a:t>Qué es una persona</a:t>
+              <a:t>Personas: qué son y cómo se construyen</a:t>
             </a:r>
             <a:endParaRPr lang="en-US" sz="4000" dirty="0"/>
           </a:p>
@@ -2189,7 +2456,7 @@
                 <a:ea typeface="Arial" pitchFamily="34" charset="-122"/>
                 <a:cs typeface="Arial" pitchFamily="34" charset="-120"/>
               </a:rPr>
-              <a:t>Solo demografía</a:t>
+              <a:t>Solo datos demográficos</a:t>
             </a:r>
             <a:endParaRPr lang="en-US" sz="1600" dirty="0"/>
           </a:p>
@@ -2730,6 +2997,1452 @@
     <p:bg>
       <p:bgPr>
         <a:solidFill>
+          <a:srgbClr val="FFFFFF"/>
+        </a:solidFill>
+      </p:bgPr>
+    </p:bg>
+    <p:spTree>
+      <p:nvGrpSpPr>
+        <p:cNvPr id="1" name=""/>
+        <p:cNvGrpSpPr/>
+        <p:nvPr/>
+      </p:nvGrpSpPr>
+      <p:grpSpPr>
+        <a:xfrm>
+          <a:off x="0" y="0"/>
+          <a:ext cx="0" cy="0"/>
+          <a:chOff x="0" y="0"/>
+          <a:chExt cx="0" cy="0"/>
+        </a:xfrm>
+      </p:grpSpPr>
+      <p:sp>
+        <p:nvSpPr>
+          <p:cNvPr id="2" name="Text 0"/>
+          <p:cNvSpPr txBox="1"/>
+          <p:nvPr/>
+        </p:nvSpPr>
+        <p:spPr>
+          <a:xfrm>
+            <a:off x="548640" y="411480"/>
+            <a:ext cx="11064240" cy="822960"/>
+          </a:xfrm>
+          <a:prstGeom prst="rect">
+            <a:avLst/>
+          </a:prstGeom>
+          <a:noFill/>
+          <a:ln/>
+        </p:spPr>
+        <p:txBody>
+          <a:bodyPr wrap="square" lIns="0" tIns="0" rIns="0" bIns="0" rtlCol="0" anchor="ctr"/>
+          <a:lstStyle/>
+          <a:p>
+            <a:pPr indent="0" marL="0">
+              <a:buNone/>
+            </a:pPr>
+            <a:r>
+              <a:rPr lang="en-US" sz="2600" b="1" dirty="0">
+                <a:solidFill>
+                  <a:srgbClr val="1F0318"/>
+                </a:solidFill>
+                <a:latin typeface="Arial" pitchFamily="34" charset="0"/>
+                <a:ea typeface="Arial" pitchFamily="34" charset="-122"/>
+                <a:cs typeface="Arial" pitchFamily="34" charset="-120"/>
+              </a:rPr>
+              <a:t>CÓMO SE CONSTRUYE: LOS CUATRO PASOS</a:t>
+            </a:r>
+            <a:endParaRPr lang="en-US" sz="2600" dirty="0"/>
+          </a:p>
+        </p:txBody>
+      </p:sp>
+      <p:sp>
+        <p:nvSpPr>
+          <p:cNvPr id="3" name="Shape 1"/>
+          <p:cNvSpPr/>
+          <p:nvPr/>
+        </p:nvSpPr>
+        <p:spPr>
+          <a:xfrm>
+            <a:off x="548640" y="1508760"/>
+            <a:ext cx="502920" cy="502920"/>
+          </a:xfrm>
+          <a:prstGeom prst="rect">
+            <a:avLst/>
+          </a:prstGeom>
+          <a:solidFill>
+            <a:srgbClr val="E93456"/>
+          </a:solidFill>
+          <a:ln/>
+        </p:spPr>
+      </p:sp>
+      <p:sp>
+        <p:nvSpPr>
+          <p:cNvPr id="4" name="Text 2"/>
+          <p:cNvSpPr txBox="1"/>
+          <p:nvPr/>
+        </p:nvSpPr>
+        <p:spPr>
+          <a:xfrm>
+            <a:off x="548640" y="1508760"/>
+            <a:ext cx="502920" cy="502920"/>
+          </a:xfrm>
+          <a:prstGeom prst="rect">
+            <a:avLst/>
+          </a:prstGeom>
+          <a:noFill/>
+          <a:ln/>
+        </p:spPr>
+        <p:txBody>
+          <a:bodyPr wrap="square" lIns="0" tIns="0" rIns="0" bIns="0" rtlCol="0" anchor="ctr"/>
+          <a:lstStyle/>
+          <a:p>
+            <a:pPr algn="ctr" indent="0" marL="0">
+              <a:buNone/>
+            </a:pPr>
+            <a:r>
+              <a:rPr lang="en-US" sz="1800" b="1" dirty="0">
+                <a:solidFill>
+                  <a:srgbClr val="FFFFFF"/>
+                </a:solidFill>
+                <a:latin typeface="Arial" pitchFamily="34" charset="0"/>
+                <a:ea typeface="Arial" pitchFamily="34" charset="-122"/>
+                <a:cs typeface="Arial" pitchFamily="34" charset="-120"/>
+              </a:rPr>
+              <a:t>1</a:t>
+            </a:r>
+            <a:endParaRPr lang="en-US" sz="1800" dirty="0"/>
+          </a:p>
+        </p:txBody>
+      </p:sp>
+      <p:sp>
+        <p:nvSpPr>
+          <p:cNvPr id="5" name="Text 3"/>
+          <p:cNvSpPr txBox="1"/>
+          <p:nvPr/>
+        </p:nvSpPr>
+        <p:spPr>
+          <a:xfrm>
+            <a:off x="1280160" y="1463040"/>
+            <a:ext cx="10241280" cy="365760"/>
+          </a:xfrm>
+          <a:prstGeom prst="rect">
+            <a:avLst/>
+          </a:prstGeom>
+          <a:noFill/>
+          <a:ln/>
+        </p:spPr>
+        <p:txBody>
+          <a:bodyPr wrap="square" lIns="0" tIns="0" rIns="0" bIns="0" rtlCol="0" anchor="ctr"/>
+          <a:lstStyle/>
+          <a:p>
+            <a:pPr indent="0" marL="0">
+              <a:buNone/>
+            </a:pPr>
+            <a:r>
+              <a:rPr lang="en-US" sz="1600" b="1" dirty="0">
+                <a:solidFill>
+                  <a:srgbClr val="1F0318"/>
+                </a:solidFill>
+                <a:latin typeface="Arial" pitchFamily="34" charset="0"/>
+                <a:ea typeface="Arial" pitchFamily="34" charset="-122"/>
+                <a:cs typeface="Arial" pitchFamily="34" charset="-120"/>
+              </a:rPr>
+              <a:t>1. Define qué quieres entender</a:t>
+            </a:r>
+            <a:endParaRPr lang="en-US" sz="1600" dirty="0"/>
+          </a:p>
+        </p:txBody>
+      </p:sp>
+      <p:sp>
+        <p:nvSpPr>
+          <p:cNvPr id="6" name="Text 4"/>
+          <p:cNvSpPr txBox="1"/>
+          <p:nvPr/>
+        </p:nvSpPr>
+        <p:spPr>
+          <a:xfrm>
+            <a:off x="1280160" y="1828800"/>
+            <a:ext cx="10241280" cy="800100"/>
+          </a:xfrm>
+          <a:prstGeom prst="rect">
+            <a:avLst/>
+          </a:prstGeom>
+          <a:noFill/>
+          <a:ln/>
+        </p:spPr>
+        <p:txBody>
+          <a:bodyPr wrap="square" lIns="0" tIns="0" rIns="0" bIns="0" rtlCol="0" anchor="t"/>
+          <a:lstStyle/>
+          <a:p>
+            <a:pPr indent="0" marL="0">
+              <a:buNone/>
+            </a:pPr>
+            <a:r>
+              <a:rPr lang="en-US" sz="1300" dirty="0">
+                <a:solidFill>
+                  <a:srgbClr val="4A5568"/>
+                </a:solidFill>
+                <a:latin typeface="Arial" pitchFamily="34" charset="0"/>
+                <a:ea typeface="Arial" pitchFamily="34" charset="-122"/>
+                <a:cs typeface="Arial" pitchFamily="34" charset="-120"/>
+              </a:rPr>
+              <a:t>Preguntas de contexto, comportamiento y fricción.</a:t>
+            </a:r>
+            <a:endParaRPr lang="en-US" sz="1300" dirty="0"/>
+          </a:p>
+        </p:txBody>
+      </p:sp>
+      <p:sp>
+        <p:nvSpPr>
+          <p:cNvPr id="7" name="Shape 5"/>
+          <p:cNvSpPr/>
+          <p:nvPr/>
+        </p:nvSpPr>
+        <p:spPr>
+          <a:xfrm>
+            <a:off x="548640" y="2720340"/>
+            <a:ext cx="502920" cy="502920"/>
+          </a:xfrm>
+          <a:prstGeom prst="rect">
+            <a:avLst/>
+          </a:prstGeom>
+          <a:solidFill>
+            <a:srgbClr val="E93456"/>
+          </a:solidFill>
+          <a:ln/>
+        </p:spPr>
+      </p:sp>
+      <p:sp>
+        <p:nvSpPr>
+          <p:cNvPr id="8" name="Text 6"/>
+          <p:cNvSpPr txBox="1"/>
+          <p:nvPr/>
+        </p:nvSpPr>
+        <p:spPr>
+          <a:xfrm>
+            <a:off x="548640" y="2720340"/>
+            <a:ext cx="502920" cy="502920"/>
+          </a:xfrm>
+          <a:prstGeom prst="rect">
+            <a:avLst/>
+          </a:prstGeom>
+          <a:noFill/>
+          <a:ln/>
+        </p:spPr>
+        <p:txBody>
+          <a:bodyPr wrap="square" lIns="0" tIns="0" rIns="0" bIns="0" rtlCol="0" anchor="ctr"/>
+          <a:lstStyle/>
+          <a:p>
+            <a:pPr algn="ctr" indent="0" marL="0">
+              <a:buNone/>
+            </a:pPr>
+            <a:r>
+              <a:rPr lang="en-US" sz="1800" b="1" dirty="0">
+                <a:solidFill>
+                  <a:srgbClr val="FFFFFF"/>
+                </a:solidFill>
+                <a:latin typeface="Arial" pitchFamily="34" charset="0"/>
+                <a:ea typeface="Arial" pitchFamily="34" charset="-122"/>
+                <a:cs typeface="Arial" pitchFamily="34" charset="-120"/>
+              </a:rPr>
+              <a:t>2</a:t>
+            </a:r>
+            <a:endParaRPr lang="en-US" sz="1800" dirty="0"/>
+          </a:p>
+        </p:txBody>
+      </p:sp>
+      <p:sp>
+        <p:nvSpPr>
+          <p:cNvPr id="9" name="Text 7"/>
+          <p:cNvSpPr txBox="1"/>
+          <p:nvPr/>
+        </p:nvSpPr>
+        <p:spPr>
+          <a:xfrm>
+            <a:off x="1280160" y="2674620"/>
+            <a:ext cx="10241280" cy="365760"/>
+          </a:xfrm>
+          <a:prstGeom prst="rect">
+            <a:avLst/>
+          </a:prstGeom>
+          <a:noFill/>
+          <a:ln/>
+        </p:spPr>
+        <p:txBody>
+          <a:bodyPr wrap="square" lIns="0" tIns="0" rIns="0" bIns="0" rtlCol="0" anchor="ctr"/>
+          <a:lstStyle/>
+          <a:p>
+            <a:pPr indent="0" marL="0">
+              <a:buNone/>
+            </a:pPr>
+            <a:r>
+              <a:rPr lang="en-US" sz="1600" b="1" dirty="0">
+                <a:solidFill>
+                  <a:srgbClr val="1F0318"/>
+                </a:solidFill>
+                <a:latin typeface="Arial" pitchFamily="34" charset="0"/>
+                <a:ea typeface="Arial" pitchFamily="34" charset="-122"/>
+                <a:cs typeface="Arial" pitchFamily="34" charset="-120"/>
+              </a:rPr>
+              <a:t>2. Recoge datos</a:t>
+            </a:r>
+            <a:endParaRPr lang="en-US" sz="1600" dirty="0"/>
+          </a:p>
+        </p:txBody>
+      </p:sp>
+      <p:sp>
+        <p:nvSpPr>
+          <p:cNvPr id="10" name="Text 8"/>
+          <p:cNvSpPr txBox="1"/>
+          <p:nvPr/>
+        </p:nvSpPr>
+        <p:spPr>
+          <a:xfrm>
+            <a:off x="1280160" y="3040380"/>
+            <a:ext cx="10241280" cy="800100"/>
+          </a:xfrm>
+          <a:prstGeom prst="rect">
+            <a:avLst/>
+          </a:prstGeom>
+          <a:noFill/>
+          <a:ln/>
+        </p:spPr>
+        <p:txBody>
+          <a:bodyPr wrap="square" lIns="0" tIns="0" rIns="0" bIns="0" rtlCol="0" anchor="t"/>
+          <a:lstStyle/>
+          <a:p>
+            <a:pPr indent="0" marL="0">
+              <a:buNone/>
+            </a:pPr>
+            <a:r>
+              <a:rPr lang="en-US" sz="1300" dirty="0">
+                <a:solidFill>
+                  <a:srgbClr val="4A5568"/>
+                </a:solidFill>
+                <a:latin typeface="Arial" pitchFamily="34" charset="0"/>
+                <a:ea typeface="Arial" pitchFamily="34" charset="-122"/>
+                <a:cs typeface="Arial" pitchFamily="34" charset="-120"/>
+              </a:rPr>
+              <a:t>Encuestas con Tally, entrevistas abiertas, test de 5 segundos con Lyssna.</a:t>
+            </a:r>
+            <a:endParaRPr lang="en-US" sz="1300" dirty="0"/>
+          </a:p>
+        </p:txBody>
+      </p:sp>
+      <p:sp>
+        <p:nvSpPr>
+          <p:cNvPr id="11" name="Shape 9"/>
+          <p:cNvSpPr/>
+          <p:nvPr/>
+        </p:nvSpPr>
+        <p:spPr>
+          <a:xfrm>
+            <a:off x="548640" y="3931920"/>
+            <a:ext cx="502920" cy="502920"/>
+          </a:xfrm>
+          <a:prstGeom prst="rect">
+            <a:avLst/>
+          </a:prstGeom>
+          <a:solidFill>
+            <a:srgbClr val="E93456"/>
+          </a:solidFill>
+          <a:ln/>
+        </p:spPr>
+      </p:sp>
+      <p:sp>
+        <p:nvSpPr>
+          <p:cNvPr id="12" name="Text 10"/>
+          <p:cNvSpPr txBox="1"/>
+          <p:nvPr/>
+        </p:nvSpPr>
+        <p:spPr>
+          <a:xfrm>
+            <a:off x="548640" y="3931920"/>
+            <a:ext cx="502920" cy="502920"/>
+          </a:xfrm>
+          <a:prstGeom prst="rect">
+            <a:avLst/>
+          </a:prstGeom>
+          <a:noFill/>
+          <a:ln/>
+        </p:spPr>
+        <p:txBody>
+          <a:bodyPr wrap="square" lIns="0" tIns="0" rIns="0" bIns="0" rtlCol="0" anchor="ctr"/>
+          <a:lstStyle/>
+          <a:p>
+            <a:pPr algn="ctr" indent="0" marL="0">
+              <a:buNone/>
+            </a:pPr>
+            <a:r>
+              <a:rPr lang="en-US" sz="1800" b="1" dirty="0">
+                <a:solidFill>
+                  <a:srgbClr val="FFFFFF"/>
+                </a:solidFill>
+                <a:latin typeface="Arial" pitchFamily="34" charset="0"/>
+                <a:ea typeface="Arial" pitchFamily="34" charset="-122"/>
+                <a:cs typeface="Arial" pitchFamily="34" charset="-120"/>
+              </a:rPr>
+              <a:t>3</a:t>
+            </a:r>
+            <a:endParaRPr lang="en-US" sz="1800" dirty="0"/>
+          </a:p>
+        </p:txBody>
+      </p:sp>
+      <p:sp>
+        <p:nvSpPr>
+          <p:cNvPr id="13" name="Text 11"/>
+          <p:cNvSpPr txBox="1"/>
+          <p:nvPr/>
+        </p:nvSpPr>
+        <p:spPr>
+          <a:xfrm>
+            <a:off x="1280160" y="3886200"/>
+            <a:ext cx="10241280" cy="365760"/>
+          </a:xfrm>
+          <a:prstGeom prst="rect">
+            <a:avLst/>
+          </a:prstGeom>
+          <a:noFill/>
+          <a:ln/>
+        </p:spPr>
+        <p:txBody>
+          <a:bodyPr wrap="square" lIns="0" tIns="0" rIns="0" bIns="0" rtlCol="0" anchor="ctr"/>
+          <a:lstStyle/>
+          <a:p>
+            <a:pPr indent="0" marL="0">
+              <a:buNone/>
+            </a:pPr>
+            <a:r>
+              <a:rPr lang="en-US" sz="1600" b="1" dirty="0">
+                <a:solidFill>
+                  <a:srgbClr val="1F0318"/>
+                </a:solidFill>
+                <a:latin typeface="Arial" pitchFamily="34" charset="0"/>
+                <a:ea typeface="Arial" pitchFamily="34" charset="-122"/>
+                <a:cs typeface="Arial" pitchFamily="34" charset="-120"/>
+              </a:rPr>
+              <a:t>3. Sintetiza los hallazgos</a:t>
+            </a:r>
+            <a:endParaRPr lang="en-US" sz="1600" dirty="0"/>
+          </a:p>
+        </p:txBody>
+      </p:sp>
+      <p:sp>
+        <p:nvSpPr>
+          <p:cNvPr id="14" name="Text 12"/>
+          <p:cNvSpPr txBox="1"/>
+          <p:nvPr/>
+        </p:nvSpPr>
+        <p:spPr>
+          <a:xfrm>
+            <a:off x="1280160" y="4251960"/>
+            <a:ext cx="10241280" cy="800100"/>
+          </a:xfrm>
+          <a:prstGeom prst="rect">
+            <a:avLst/>
+          </a:prstGeom>
+          <a:noFill/>
+          <a:ln/>
+        </p:spPr>
+        <p:txBody>
+          <a:bodyPr wrap="square" lIns="0" tIns="0" rIns="0" bIns="0" rtlCol="0" anchor="t"/>
+          <a:lstStyle/>
+          <a:p>
+            <a:pPr indent="0" marL="0">
+              <a:buNone/>
+            </a:pPr>
+            <a:r>
+              <a:rPr lang="en-US" sz="1300" dirty="0">
+                <a:solidFill>
+                  <a:srgbClr val="4A5568"/>
+                </a:solidFill>
+                <a:latin typeface="Arial" pitchFamily="34" charset="0"/>
+                <a:ea typeface="Arial" pitchFamily="34" charset="-122"/>
+                <a:cs typeface="Arial" pitchFamily="34" charset="-120"/>
+              </a:rPr>
+              <a:t>Affinity mapping: agrupar por afinidad, sin forzar categorías propias.</a:t>
+            </a:r>
+            <a:endParaRPr lang="en-US" sz="1300" dirty="0"/>
+          </a:p>
+        </p:txBody>
+      </p:sp>
+      <p:sp>
+        <p:nvSpPr>
+          <p:cNvPr id="15" name="Shape 13"/>
+          <p:cNvSpPr/>
+          <p:nvPr/>
+        </p:nvSpPr>
+        <p:spPr>
+          <a:xfrm>
+            <a:off x="548640" y="5143500"/>
+            <a:ext cx="502920" cy="502920"/>
+          </a:xfrm>
+          <a:prstGeom prst="rect">
+            <a:avLst/>
+          </a:prstGeom>
+          <a:solidFill>
+            <a:srgbClr val="E93456"/>
+          </a:solidFill>
+          <a:ln/>
+        </p:spPr>
+      </p:sp>
+      <p:sp>
+        <p:nvSpPr>
+          <p:cNvPr id="16" name="Text 14"/>
+          <p:cNvSpPr txBox="1"/>
+          <p:nvPr/>
+        </p:nvSpPr>
+        <p:spPr>
+          <a:xfrm>
+            <a:off x="548640" y="5143500"/>
+            <a:ext cx="502920" cy="502920"/>
+          </a:xfrm>
+          <a:prstGeom prst="rect">
+            <a:avLst/>
+          </a:prstGeom>
+          <a:noFill/>
+          <a:ln/>
+        </p:spPr>
+        <p:txBody>
+          <a:bodyPr wrap="square" lIns="0" tIns="0" rIns="0" bIns="0" rtlCol="0" anchor="ctr"/>
+          <a:lstStyle/>
+          <a:p>
+            <a:pPr algn="ctr" indent="0" marL="0">
+              <a:buNone/>
+            </a:pPr>
+            <a:r>
+              <a:rPr lang="en-US" sz="1800" b="1" dirty="0">
+                <a:solidFill>
+                  <a:srgbClr val="FFFFFF"/>
+                </a:solidFill>
+                <a:latin typeface="Arial" pitchFamily="34" charset="0"/>
+                <a:ea typeface="Arial" pitchFamily="34" charset="-122"/>
+                <a:cs typeface="Arial" pitchFamily="34" charset="-120"/>
+              </a:rPr>
+              <a:t>4</a:t>
+            </a:r>
+            <a:endParaRPr lang="en-US" sz="1800" dirty="0"/>
+          </a:p>
+        </p:txBody>
+      </p:sp>
+      <p:sp>
+        <p:nvSpPr>
+          <p:cNvPr id="17" name="Text 15"/>
+          <p:cNvSpPr txBox="1"/>
+          <p:nvPr/>
+        </p:nvSpPr>
+        <p:spPr>
+          <a:xfrm>
+            <a:off x="1280160" y="5097780"/>
+            <a:ext cx="10241280" cy="365760"/>
+          </a:xfrm>
+          <a:prstGeom prst="rect">
+            <a:avLst/>
+          </a:prstGeom>
+          <a:noFill/>
+          <a:ln/>
+        </p:spPr>
+        <p:txBody>
+          <a:bodyPr wrap="square" lIns="0" tIns="0" rIns="0" bIns="0" rtlCol="0" anchor="ctr"/>
+          <a:lstStyle/>
+          <a:p>
+            <a:pPr indent="0" marL="0">
+              <a:buNone/>
+            </a:pPr>
+            <a:r>
+              <a:rPr lang="en-US" sz="1600" b="1" dirty="0">
+                <a:solidFill>
+                  <a:srgbClr val="1F0318"/>
+                </a:solidFill>
+                <a:latin typeface="Arial" pitchFamily="34" charset="0"/>
+                <a:ea typeface="Arial" pitchFamily="34" charset="-122"/>
+                <a:cs typeface="Arial" pitchFamily="34" charset="-120"/>
+              </a:rPr>
+              <a:t>4. Redacta la ficha</a:t>
+            </a:r>
+            <a:endParaRPr lang="en-US" sz="1600" dirty="0"/>
+          </a:p>
+        </p:txBody>
+      </p:sp>
+      <p:sp>
+        <p:nvSpPr>
+          <p:cNvPr id="18" name="Text 16"/>
+          <p:cNvSpPr txBox="1"/>
+          <p:nvPr/>
+        </p:nvSpPr>
+        <p:spPr>
+          <a:xfrm>
+            <a:off x="1280160" y="5463540"/>
+            <a:ext cx="10241280" cy="800100"/>
+          </a:xfrm>
+          <a:prstGeom prst="rect">
+            <a:avLst/>
+          </a:prstGeom>
+          <a:noFill/>
+          <a:ln/>
+        </p:spPr>
+        <p:txBody>
+          <a:bodyPr wrap="square" lIns="0" tIns="0" rIns="0" bIns="0" rtlCol="0" anchor="t"/>
+          <a:lstStyle/>
+          <a:p>
+            <a:pPr indent="0" marL="0">
+              <a:buNone/>
+            </a:pPr>
+            <a:r>
+              <a:rPr lang="en-US" sz="1300" dirty="0">
+                <a:solidFill>
+                  <a:srgbClr val="4A5568"/>
+                </a:solidFill>
+                <a:latin typeface="Arial" pitchFamily="34" charset="0"/>
+                <a:ea typeface="Arial" pitchFamily="34" charset="-122"/>
+                <a:cs typeface="Arial" pitchFamily="34" charset="-120"/>
+              </a:rPr>
+              <a:t>Nombre, cita, contexto de uso, objetivos y frustraciones.</a:t>
+            </a:r>
+            <a:endParaRPr lang="en-US" sz="1300" dirty="0"/>
+          </a:p>
+        </p:txBody>
+      </p:sp>
+    </p:spTree>
+  </p:cSld>
+  <p:clrMapOvr>
+    <a:masterClrMapping/>
+  </p:clrMapOvr>
+</p:sld>
+</file>
+
+<file path=ppt/slides/slide6.xml><?xml version="1.0" encoding="utf-8"?>
+<p:sld xmlns:a="http://schemas.openxmlformats.org/drawingml/2006/main" xmlns:r="http://schemas.openxmlformats.org/officeDocument/2006/relationships" xmlns:p="http://schemas.openxmlformats.org/presentationml/2006/main">
+  <p:cSld name="Slide 6">
+    <p:bg>
+      <p:bgPr>
+        <a:solidFill>
+          <a:srgbClr val="FFFFFF"/>
+        </a:solidFill>
+      </p:bgPr>
+    </p:bg>
+    <p:spTree>
+      <p:nvGrpSpPr>
+        <p:cNvPr id="1" name=""/>
+        <p:cNvGrpSpPr/>
+        <p:nvPr/>
+      </p:nvGrpSpPr>
+      <p:grpSpPr>
+        <a:xfrm>
+          <a:off x="0" y="0"/>
+          <a:ext cx="0" cy="0"/>
+          <a:chOff x="0" y="0"/>
+          <a:chExt cx="0" cy="0"/>
+        </a:xfrm>
+      </p:grpSpPr>
+      <p:sp>
+        <p:nvSpPr>
+          <p:cNvPr id="2" name="Text 0"/>
+          <p:cNvSpPr txBox="1"/>
+          <p:nvPr/>
+        </p:nvSpPr>
+        <p:spPr>
+          <a:xfrm>
+            <a:off x="548640" y="411480"/>
+            <a:ext cx="11064240" cy="822960"/>
+          </a:xfrm>
+          <a:prstGeom prst="rect">
+            <a:avLst/>
+          </a:prstGeom>
+          <a:noFill/>
+          <a:ln/>
+        </p:spPr>
+        <p:txBody>
+          <a:bodyPr wrap="square" lIns="0" tIns="0" rIns="0" bIns="0" rtlCol="0" anchor="ctr"/>
+          <a:lstStyle/>
+          <a:p>
+            <a:pPr indent="0" marL="0">
+              <a:buNone/>
+            </a:pPr>
+            <a:r>
+              <a:rPr lang="en-US" sz="2600" b="1" dirty="0">
+                <a:solidFill>
+                  <a:srgbClr val="1F0318"/>
+                </a:solidFill>
+                <a:latin typeface="Arial" pitchFamily="34" charset="0"/>
+                <a:ea typeface="Arial" pitchFamily="34" charset="-122"/>
+                <a:cs typeface="Arial" pitchFamily="34" charset="-120"/>
+              </a:rPr>
+              <a:t>ÉTICA DE LA INVESTIGACIÓN</a:t>
+            </a:r>
+            <a:endParaRPr lang="en-US" sz="2600" dirty="0"/>
+          </a:p>
+        </p:txBody>
+      </p:sp>
+      <p:sp>
+        <p:nvSpPr>
+          <p:cNvPr id="3" name="Shape 1"/>
+          <p:cNvSpPr/>
+          <p:nvPr/>
+        </p:nvSpPr>
+        <p:spPr>
+          <a:xfrm>
+            <a:off x="548640" y="1508760"/>
+            <a:ext cx="502920" cy="502920"/>
+          </a:xfrm>
+          <a:prstGeom prst="rect">
+            <a:avLst/>
+          </a:prstGeom>
+          <a:solidFill>
+            <a:srgbClr val="E93456"/>
+          </a:solidFill>
+          <a:ln/>
+        </p:spPr>
+      </p:sp>
+      <p:sp>
+        <p:nvSpPr>
+          <p:cNvPr id="4" name="Text 2"/>
+          <p:cNvSpPr txBox="1"/>
+          <p:nvPr/>
+        </p:nvSpPr>
+        <p:spPr>
+          <a:xfrm>
+            <a:off x="548640" y="1508760"/>
+            <a:ext cx="502920" cy="502920"/>
+          </a:xfrm>
+          <a:prstGeom prst="rect">
+            <a:avLst/>
+          </a:prstGeom>
+          <a:noFill/>
+          <a:ln/>
+        </p:spPr>
+        <p:txBody>
+          <a:bodyPr wrap="square" lIns="0" tIns="0" rIns="0" bIns="0" rtlCol="0" anchor="ctr"/>
+          <a:lstStyle/>
+          <a:p>
+            <a:pPr algn="ctr" indent="0" marL="0">
+              <a:buNone/>
+            </a:pPr>
+            <a:r>
+              <a:rPr lang="en-US" sz="1800" b="1" dirty="0">
+                <a:solidFill>
+                  <a:srgbClr val="FFFFFF"/>
+                </a:solidFill>
+                <a:latin typeface="Arial" pitchFamily="34" charset="0"/>
+                <a:ea typeface="Arial" pitchFamily="34" charset="-122"/>
+                <a:cs typeface="Arial" pitchFamily="34" charset="-120"/>
+              </a:rPr>
+              <a:t>1</a:t>
+            </a:r>
+            <a:endParaRPr lang="en-US" sz="1800" dirty="0"/>
+          </a:p>
+        </p:txBody>
+      </p:sp>
+      <p:sp>
+        <p:nvSpPr>
+          <p:cNvPr id="5" name="Text 3"/>
+          <p:cNvSpPr txBox="1"/>
+          <p:nvPr/>
+        </p:nvSpPr>
+        <p:spPr>
+          <a:xfrm>
+            <a:off x="1280160" y="1463040"/>
+            <a:ext cx="10241280" cy="365760"/>
+          </a:xfrm>
+          <a:prstGeom prst="rect">
+            <a:avLst/>
+          </a:prstGeom>
+          <a:noFill/>
+          <a:ln/>
+        </p:spPr>
+        <p:txBody>
+          <a:bodyPr wrap="square" lIns="0" tIns="0" rIns="0" bIns="0" rtlCol="0" anchor="ctr"/>
+          <a:lstStyle/>
+          <a:p>
+            <a:pPr indent="0" marL="0">
+              <a:buNone/>
+            </a:pPr>
+            <a:r>
+              <a:rPr lang="en-US" sz="1600" b="1" dirty="0">
+                <a:solidFill>
+                  <a:srgbClr val="1F0318"/>
+                </a:solidFill>
+                <a:latin typeface="Arial" pitchFamily="34" charset="0"/>
+                <a:ea typeface="Arial" pitchFamily="34" charset="-122"/>
+                <a:cs typeface="Arial" pitchFamily="34" charset="-120"/>
+              </a:rPr>
+              <a:t>Consentimiento</a:t>
+            </a:r>
+            <a:endParaRPr lang="en-US" sz="1600" dirty="0"/>
+          </a:p>
+        </p:txBody>
+      </p:sp>
+      <p:sp>
+        <p:nvSpPr>
+          <p:cNvPr id="6" name="Text 4"/>
+          <p:cNvSpPr txBox="1"/>
+          <p:nvPr/>
+        </p:nvSpPr>
+        <p:spPr>
+          <a:xfrm>
+            <a:off x="1280160" y="1828800"/>
+            <a:ext cx="10241280" cy="2011680"/>
+          </a:xfrm>
+          <a:prstGeom prst="rect">
+            <a:avLst/>
+          </a:prstGeom>
+          <a:noFill/>
+          <a:ln/>
+        </p:spPr>
+        <p:txBody>
+          <a:bodyPr wrap="square" lIns="0" tIns="0" rIns="0" bIns="0" rtlCol="0" anchor="t"/>
+          <a:lstStyle/>
+          <a:p>
+            <a:pPr indent="0" marL="0">
+              <a:buNone/>
+            </a:pPr>
+            <a:r>
+              <a:rPr lang="en-US" sz="1300" dirty="0">
+                <a:solidFill>
+                  <a:srgbClr val="4A5568"/>
+                </a:solidFill>
+                <a:latin typeface="Arial" pitchFamily="34" charset="0"/>
+                <a:ea typeface="Arial" pitchFamily="34" charset="-122"/>
+                <a:cs typeface="Arial" pitchFamily="34" charset="-120"/>
+              </a:rPr>
+              <a:t>La persona sabe para qué se van a usar sus respuestas y lo acepta.</a:t>
+            </a:r>
+            <a:endParaRPr lang="en-US" sz="1300" dirty="0"/>
+          </a:p>
+        </p:txBody>
+      </p:sp>
+      <p:sp>
+        <p:nvSpPr>
+          <p:cNvPr id="7" name="Shape 5"/>
+          <p:cNvSpPr/>
+          <p:nvPr/>
+        </p:nvSpPr>
+        <p:spPr>
+          <a:xfrm>
+            <a:off x="548640" y="3931920"/>
+            <a:ext cx="502920" cy="502920"/>
+          </a:xfrm>
+          <a:prstGeom prst="rect">
+            <a:avLst/>
+          </a:prstGeom>
+          <a:solidFill>
+            <a:srgbClr val="E93456"/>
+          </a:solidFill>
+          <a:ln/>
+        </p:spPr>
+      </p:sp>
+      <p:sp>
+        <p:nvSpPr>
+          <p:cNvPr id="8" name="Text 6"/>
+          <p:cNvSpPr txBox="1"/>
+          <p:nvPr/>
+        </p:nvSpPr>
+        <p:spPr>
+          <a:xfrm>
+            <a:off x="548640" y="3931920"/>
+            <a:ext cx="502920" cy="502920"/>
+          </a:xfrm>
+          <a:prstGeom prst="rect">
+            <a:avLst/>
+          </a:prstGeom>
+          <a:noFill/>
+          <a:ln/>
+        </p:spPr>
+        <p:txBody>
+          <a:bodyPr wrap="square" lIns="0" tIns="0" rIns="0" bIns="0" rtlCol="0" anchor="ctr"/>
+          <a:lstStyle/>
+          <a:p>
+            <a:pPr algn="ctr" indent="0" marL="0">
+              <a:buNone/>
+            </a:pPr>
+            <a:r>
+              <a:rPr lang="en-US" sz="1800" b="1" dirty="0">
+                <a:solidFill>
+                  <a:srgbClr val="FFFFFF"/>
+                </a:solidFill>
+                <a:latin typeface="Arial" pitchFamily="34" charset="0"/>
+                <a:ea typeface="Arial" pitchFamily="34" charset="-122"/>
+                <a:cs typeface="Arial" pitchFamily="34" charset="-120"/>
+              </a:rPr>
+              <a:t>2</a:t>
+            </a:r>
+            <a:endParaRPr lang="en-US" sz="1800" dirty="0"/>
+          </a:p>
+        </p:txBody>
+      </p:sp>
+      <p:sp>
+        <p:nvSpPr>
+          <p:cNvPr id="9" name="Text 7"/>
+          <p:cNvSpPr txBox="1"/>
+          <p:nvPr/>
+        </p:nvSpPr>
+        <p:spPr>
+          <a:xfrm>
+            <a:off x="1280160" y="3886200"/>
+            <a:ext cx="10241280" cy="365760"/>
+          </a:xfrm>
+          <a:prstGeom prst="rect">
+            <a:avLst/>
+          </a:prstGeom>
+          <a:noFill/>
+          <a:ln/>
+        </p:spPr>
+        <p:txBody>
+          <a:bodyPr wrap="square" lIns="0" tIns="0" rIns="0" bIns="0" rtlCol="0" anchor="ctr"/>
+          <a:lstStyle/>
+          <a:p>
+            <a:pPr indent="0" marL="0">
+              <a:buNone/>
+            </a:pPr>
+            <a:r>
+              <a:rPr lang="en-US" sz="1600" b="1" dirty="0">
+                <a:solidFill>
+                  <a:srgbClr val="1F0318"/>
+                </a:solidFill>
+                <a:latin typeface="Arial" pitchFamily="34" charset="0"/>
+                <a:ea typeface="Arial" pitchFamily="34" charset="-122"/>
+                <a:cs typeface="Arial" pitchFamily="34" charset="-120"/>
+              </a:rPr>
+              <a:t>Anonimización</a:t>
+            </a:r>
+            <a:endParaRPr lang="en-US" sz="1600" dirty="0"/>
+          </a:p>
+        </p:txBody>
+      </p:sp>
+      <p:sp>
+        <p:nvSpPr>
+          <p:cNvPr id="10" name="Text 8"/>
+          <p:cNvSpPr txBox="1"/>
+          <p:nvPr/>
+        </p:nvSpPr>
+        <p:spPr>
+          <a:xfrm>
+            <a:off x="1280160" y="4251960"/>
+            <a:ext cx="10241280" cy="2011680"/>
+          </a:xfrm>
+          <a:prstGeom prst="rect">
+            <a:avLst/>
+          </a:prstGeom>
+          <a:noFill/>
+          <a:ln/>
+        </p:spPr>
+        <p:txBody>
+          <a:bodyPr wrap="square" lIns="0" tIns="0" rIns="0" bIns="0" rtlCol="0" anchor="t"/>
+          <a:lstStyle/>
+          <a:p>
+            <a:pPr indent="0" marL="0">
+              <a:buNone/>
+            </a:pPr>
+            <a:r>
+              <a:rPr lang="en-US" sz="1300" dirty="0">
+                <a:solidFill>
+                  <a:srgbClr val="4A5568"/>
+                </a:solidFill>
+                <a:latin typeface="Arial" pitchFamily="34" charset="0"/>
+                <a:ea typeface="Arial" pitchFamily="34" charset="-122"/>
+                <a:cs typeface="Arial" pitchFamily="34" charset="-120"/>
+              </a:rPr>
+              <a:t>Lo que interesa son los patrones, no las identidades.</a:t>
+            </a:r>
+            <a:endParaRPr lang="en-US" sz="1300" dirty="0"/>
+          </a:p>
+        </p:txBody>
+      </p:sp>
+    </p:spTree>
+  </p:cSld>
+  <p:clrMapOvr>
+    <a:masterClrMapping/>
+  </p:clrMapOvr>
+</p:sld>
+</file>
+
+<file path=ppt/slides/slide7.xml><?xml version="1.0" encoding="utf-8"?>
+<p:sld xmlns:a="http://schemas.openxmlformats.org/drawingml/2006/main" xmlns:r="http://schemas.openxmlformats.org/officeDocument/2006/relationships" xmlns:p="http://schemas.openxmlformats.org/presentationml/2006/main">
+  <p:cSld name="Slide 7">
+    <p:bg>
+      <p:bgPr>
+        <a:solidFill>
+          <a:srgbClr val="FFFFFF"/>
+        </a:solidFill>
+      </p:bgPr>
+    </p:bg>
+    <p:spTree>
+      <p:nvGrpSpPr>
+        <p:cNvPr id="1" name=""/>
+        <p:cNvGrpSpPr/>
+        <p:nvPr/>
+      </p:nvGrpSpPr>
+      <p:grpSpPr>
+        <a:xfrm>
+          <a:off x="0" y="0"/>
+          <a:ext cx="0" cy="0"/>
+          <a:chOff x="0" y="0"/>
+          <a:chExt cx="0" cy="0"/>
+        </a:xfrm>
+      </p:grpSpPr>
+      <p:sp>
+        <p:nvSpPr>
+          <p:cNvPr id="2" name="Text 0"/>
+          <p:cNvSpPr txBox="1"/>
+          <p:nvPr/>
+        </p:nvSpPr>
+        <p:spPr>
+          <a:xfrm>
+            <a:off x="548640" y="411480"/>
+            <a:ext cx="11064240" cy="822960"/>
+          </a:xfrm>
+          <a:prstGeom prst="rect">
+            <a:avLst/>
+          </a:prstGeom>
+          <a:noFill/>
+          <a:ln/>
+        </p:spPr>
+        <p:txBody>
+          <a:bodyPr wrap="square" lIns="0" tIns="0" rIns="0" bIns="0" rtlCol="0" anchor="ctr"/>
+          <a:lstStyle/>
+          <a:p>
+            <a:pPr indent="0" marL="0">
+              <a:buNone/>
+            </a:pPr>
+            <a:r>
+              <a:rPr lang="en-US" sz="2600" b="1" dirty="0">
+                <a:solidFill>
+                  <a:srgbClr val="1F0318"/>
+                </a:solidFill>
+                <a:latin typeface="Arial" pitchFamily="34" charset="0"/>
+                <a:ea typeface="Arial" pitchFamily="34" charset="-122"/>
+                <a:cs typeface="Arial" pitchFamily="34" charset="-120"/>
+              </a:rPr>
+              <a:t>LA FICHA DE LA PERSONA CON DIVERSIDAD FUNCIONAL</a:t>
+            </a:r>
+            <a:endParaRPr lang="en-US" sz="2600" dirty="0"/>
+          </a:p>
+        </p:txBody>
+      </p:sp>
+      <p:sp>
+        <p:nvSpPr>
+          <p:cNvPr id="3" name="Shape 1"/>
+          <p:cNvSpPr/>
+          <p:nvPr/>
+        </p:nvSpPr>
+        <p:spPr>
+          <a:xfrm>
+            <a:off x="548640" y="1508760"/>
+            <a:ext cx="502920" cy="502920"/>
+          </a:xfrm>
+          <a:prstGeom prst="rect">
+            <a:avLst/>
+          </a:prstGeom>
+          <a:solidFill>
+            <a:srgbClr val="E93456"/>
+          </a:solidFill>
+          <a:ln/>
+        </p:spPr>
+      </p:sp>
+      <p:sp>
+        <p:nvSpPr>
+          <p:cNvPr id="4" name="Text 2"/>
+          <p:cNvSpPr txBox="1"/>
+          <p:nvPr/>
+        </p:nvSpPr>
+        <p:spPr>
+          <a:xfrm>
+            <a:off x="548640" y="1508760"/>
+            <a:ext cx="502920" cy="502920"/>
+          </a:xfrm>
+          <a:prstGeom prst="rect">
+            <a:avLst/>
+          </a:prstGeom>
+          <a:noFill/>
+          <a:ln/>
+        </p:spPr>
+        <p:txBody>
+          <a:bodyPr wrap="square" lIns="0" tIns="0" rIns="0" bIns="0" rtlCol="0" anchor="ctr"/>
+          <a:lstStyle/>
+          <a:p>
+            <a:pPr algn="ctr" indent="0" marL="0">
+              <a:buNone/>
+            </a:pPr>
+            <a:r>
+              <a:rPr lang="en-US" sz="1800" b="1" dirty="0">
+                <a:solidFill>
+                  <a:srgbClr val="FFFFFF"/>
+                </a:solidFill>
+                <a:latin typeface="Arial" pitchFamily="34" charset="0"/>
+                <a:ea typeface="Arial" pitchFamily="34" charset="-122"/>
+                <a:cs typeface="Arial" pitchFamily="34" charset="-120"/>
+              </a:rPr>
+              <a:t>1</a:t>
+            </a:r>
+            <a:endParaRPr lang="en-US" sz="1800" dirty="0"/>
+          </a:p>
+        </p:txBody>
+      </p:sp>
+      <p:sp>
+        <p:nvSpPr>
+          <p:cNvPr id="5" name="Text 3"/>
+          <p:cNvSpPr txBox="1"/>
+          <p:nvPr/>
+        </p:nvSpPr>
+        <p:spPr>
+          <a:xfrm>
+            <a:off x="1280160" y="1463040"/>
+            <a:ext cx="10241280" cy="365760"/>
+          </a:xfrm>
+          <a:prstGeom prst="rect">
+            <a:avLst/>
+          </a:prstGeom>
+          <a:noFill/>
+          <a:ln/>
+        </p:spPr>
+        <p:txBody>
+          <a:bodyPr wrap="square" lIns="0" tIns="0" rIns="0" bIns="0" rtlCol="0" anchor="ctr"/>
+          <a:lstStyle/>
+          <a:p>
+            <a:pPr indent="0" marL="0">
+              <a:buNone/>
+            </a:pPr>
+            <a:r>
+              <a:rPr lang="en-US" sz="1600" b="1" dirty="0">
+                <a:solidFill>
+                  <a:srgbClr val="1F0318"/>
+                </a:solidFill>
+                <a:latin typeface="Arial" pitchFamily="34" charset="0"/>
+                <a:ea typeface="Arial" pitchFamily="34" charset="-122"/>
+                <a:cs typeface="Arial" pitchFamily="34" charset="-120"/>
+              </a:rPr>
+              <a:t>Tipo de diversidad funcional</a:t>
+            </a:r>
+            <a:endParaRPr lang="en-US" sz="1600" dirty="0"/>
+          </a:p>
+        </p:txBody>
+      </p:sp>
+      <p:sp>
+        <p:nvSpPr>
+          <p:cNvPr id="6" name="Text 4"/>
+          <p:cNvSpPr txBox="1"/>
+          <p:nvPr/>
+        </p:nvSpPr>
+        <p:spPr>
+          <a:xfrm>
+            <a:off x="1280160" y="1828800"/>
+            <a:ext cx="10241280" cy="1203960"/>
+          </a:xfrm>
+          <a:prstGeom prst="rect">
+            <a:avLst/>
+          </a:prstGeom>
+          <a:noFill/>
+          <a:ln/>
+        </p:spPr>
+        <p:txBody>
+          <a:bodyPr wrap="square" lIns="0" tIns="0" rIns="0" bIns="0" rtlCol="0" anchor="t"/>
+          <a:lstStyle/>
+          <a:p>
+            <a:pPr indent="0" marL="0">
+              <a:buNone/>
+            </a:pPr>
+            <a:r>
+              <a:rPr lang="en-US" sz="1300" dirty="0">
+                <a:solidFill>
+                  <a:srgbClr val="4A5568"/>
+                </a:solidFill>
+                <a:latin typeface="Arial" pitchFamily="34" charset="0"/>
+                <a:ea typeface="Arial" pitchFamily="34" charset="-122"/>
+                <a:cs typeface="Arial" pitchFamily="34" charset="-120"/>
+              </a:rPr>
+              <a:t>Visual, motora, cognitiva o auditiva.</a:t>
+            </a:r>
+            <a:endParaRPr lang="en-US" sz="1300" dirty="0"/>
+          </a:p>
+        </p:txBody>
+      </p:sp>
+      <p:sp>
+        <p:nvSpPr>
+          <p:cNvPr id="7" name="Shape 5"/>
+          <p:cNvSpPr/>
+          <p:nvPr/>
+        </p:nvSpPr>
+        <p:spPr>
+          <a:xfrm>
+            <a:off x="548640" y="3124200"/>
+            <a:ext cx="502920" cy="502920"/>
+          </a:xfrm>
+          <a:prstGeom prst="rect">
+            <a:avLst/>
+          </a:prstGeom>
+          <a:solidFill>
+            <a:srgbClr val="E93456"/>
+          </a:solidFill>
+          <a:ln/>
+        </p:spPr>
+      </p:sp>
+      <p:sp>
+        <p:nvSpPr>
+          <p:cNvPr id="8" name="Text 6"/>
+          <p:cNvSpPr txBox="1"/>
+          <p:nvPr/>
+        </p:nvSpPr>
+        <p:spPr>
+          <a:xfrm>
+            <a:off x="548640" y="3124200"/>
+            <a:ext cx="502920" cy="502920"/>
+          </a:xfrm>
+          <a:prstGeom prst="rect">
+            <a:avLst/>
+          </a:prstGeom>
+          <a:noFill/>
+          <a:ln/>
+        </p:spPr>
+        <p:txBody>
+          <a:bodyPr wrap="square" lIns="0" tIns="0" rIns="0" bIns="0" rtlCol="0" anchor="ctr"/>
+          <a:lstStyle/>
+          <a:p>
+            <a:pPr algn="ctr" indent="0" marL="0">
+              <a:buNone/>
+            </a:pPr>
+            <a:r>
+              <a:rPr lang="en-US" sz="1800" b="1" dirty="0">
+                <a:solidFill>
+                  <a:srgbClr val="FFFFFF"/>
+                </a:solidFill>
+                <a:latin typeface="Arial" pitchFamily="34" charset="0"/>
+                <a:ea typeface="Arial" pitchFamily="34" charset="-122"/>
+                <a:cs typeface="Arial" pitchFamily="34" charset="-120"/>
+              </a:rPr>
+              <a:t>2</a:t>
+            </a:r>
+            <a:endParaRPr lang="en-US" sz="1800" dirty="0"/>
+          </a:p>
+        </p:txBody>
+      </p:sp>
+      <p:sp>
+        <p:nvSpPr>
+          <p:cNvPr id="9" name="Text 7"/>
+          <p:cNvSpPr txBox="1"/>
+          <p:nvPr/>
+        </p:nvSpPr>
+        <p:spPr>
+          <a:xfrm>
+            <a:off x="1280160" y="3078480"/>
+            <a:ext cx="10241280" cy="365760"/>
+          </a:xfrm>
+          <a:prstGeom prst="rect">
+            <a:avLst/>
+          </a:prstGeom>
+          <a:noFill/>
+          <a:ln/>
+        </p:spPr>
+        <p:txBody>
+          <a:bodyPr wrap="square" lIns="0" tIns="0" rIns="0" bIns="0" rtlCol="0" anchor="ctr"/>
+          <a:lstStyle/>
+          <a:p>
+            <a:pPr indent="0" marL="0">
+              <a:buNone/>
+            </a:pPr>
+            <a:r>
+              <a:rPr lang="en-US" sz="1600" b="1" dirty="0">
+                <a:solidFill>
+                  <a:srgbClr val="1F0318"/>
+                </a:solidFill>
+                <a:latin typeface="Arial" pitchFamily="34" charset="0"/>
+                <a:ea typeface="Arial" pitchFamily="34" charset="-122"/>
+                <a:cs typeface="Arial" pitchFamily="34" charset="-120"/>
+              </a:rPr>
+              <a:t>Tecnologías de apoyo</a:t>
+            </a:r>
+            <a:endParaRPr lang="en-US" sz="1600" dirty="0"/>
+          </a:p>
+        </p:txBody>
+      </p:sp>
+      <p:sp>
+        <p:nvSpPr>
+          <p:cNvPr id="10" name="Text 8"/>
+          <p:cNvSpPr txBox="1"/>
+          <p:nvPr/>
+        </p:nvSpPr>
+        <p:spPr>
+          <a:xfrm>
+            <a:off x="1280160" y="3444240"/>
+            <a:ext cx="10241280" cy="1203960"/>
+          </a:xfrm>
+          <a:prstGeom prst="rect">
+            <a:avLst/>
+          </a:prstGeom>
+          <a:noFill/>
+          <a:ln/>
+        </p:spPr>
+        <p:txBody>
+          <a:bodyPr wrap="square" lIns="0" tIns="0" rIns="0" bIns="0" rtlCol="0" anchor="t"/>
+          <a:lstStyle/>
+          <a:p>
+            <a:pPr indent="0" marL="0">
+              <a:buNone/>
+            </a:pPr>
+            <a:r>
+              <a:rPr lang="en-US" sz="1300" dirty="0">
+                <a:solidFill>
+                  <a:srgbClr val="4A5568"/>
+                </a:solidFill>
+                <a:latin typeface="Arial" pitchFamily="34" charset="0"/>
+                <a:ea typeface="Arial" pitchFamily="34" charset="-122"/>
+                <a:cs typeface="Arial" pitchFamily="34" charset="-120"/>
+              </a:rPr>
+              <a:t>Lector de pantalla, navegación por teclado, control por voz.</a:t>
+            </a:r>
+            <a:endParaRPr lang="en-US" sz="1300" dirty="0"/>
+          </a:p>
+        </p:txBody>
+      </p:sp>
+      <p:sp>
+        <p:nvSpPr>
+          <p:cNvPr id="11" name="Shape 9"/>
+          <p:cNvSpPr/>
+          <p:nvPr/>
+        </p:nvSpPr>
+        <p:spPr>
+          <a:xfrm>
+            <a:off x="548640" y="4739640"/>
+            <a:ext cx="502920" cy="502920"/>
+          </a:xfrm>
+          <a:prstGeom prst="rect">
+            <a:avLst/>
+          </a:prstGeom>
+          <a:solidFill>
+            <a:srgbClr val="E93456"/>
+          </a:solidFill>
+          <a:ln/>
+        </p:spPr>
+      </p:sp>
+      <p:sp>
+        <p:nvSpPr>
+          <p:cNvPr id="12" name="Text 10"/>
+          <p:cNvSpPr txBox="1"/>
+          <p:nvPr/>
+        </p:nvSpPr>
+        <p:spPr>
+          <a:xfrm>
+            <a:off x="548640" y="4739640"/>
+            <a:ext cx="502920" cy="502920"/>
+          </a:xfrm>
+          <a:prstGeom prst="rect">
+            <a:avLst/>
+          </a:prstGeom>
+          <a:noFill/>
+          <a:ln/>
+        </p:spPr>
+        <p:txBody>
+          <a:bodyPr wrap="square" lIns="0" tIns="0" rIns="0" bIns="0" rtlCol="0" anchor="ctr"/>
+          <a:lstStyle/>
+          <a:p>
+            <a:pPr algn="ctr" indent="0" marL="0">
+              <a:buNone/>
+            </a:pPr>
+            <a:r>
+              <a:rPr lang="en-US" sz="1800" b="1" dirty="0">
+                <a:solidFill>
+                  <a:srgbClr val="FFFFFF"/>
+                </a:solidFill>
+                <a:latin typeface="Arial" pitchFamily="34" charset="0"/>
+                <a:ea typeface="Arial" pitchFamily="34" charset="-122"/>
+                <a:cs typeface="Arial" pitchFamily="34" charset="-120"/>
+              </a:rPr>
+              <a:t>3</a:t>
+            </a:r>
+            <a:endParaRPr lang="en-US" sz="1800" dirty="0"/>
+          </a:p>
+        </p:txBody>
+      </p:sp>
+      <p:sp>
+        <p:nvSpPr>
+          <p:cNvPr id="13" name="Text 11"/>
+          <p:cNvSpPr txBox="1"/>
+          <p:nvPr/>
+        </p:nvSpPr>
+        <p:spPr>
+          <a:xfrm>
+            <a:off x="1280160" y="4693920"/>
+            <a:ext cx="10241280" cy="365760"/>
+          </a:xfrm>
+          <a:prstGeom prst="rect">
+            <a:avLst/>
+          </a:prstGeom>
+          <a:noFill/>
+          <a:ln/>
+        </p:spPr>
+        <p:txBody>
+          <a:bodyPr wrap="square" lIns="0" tIns="0" rIns="0" bIns="0" rtlCol="0" anchor="ctr"/>
+          <a:lstStyle/>
+          <a:p>
+            <a:pPr indent="0" marL="0">
+              <a:buNone/>
+            </a:pPr>
+            <a:r>
+              <a:rPr lang="en-US" sz="1600" b="1" dirty="0">
+                <a:solidFill>
+                  <a:srgbClr val="1F0318"/>
+                </a:solidFill>
+                <a:latin typeface="Arial" pitchFamily="34" charset="0"/>
+                <a:ea typeface="Arial" pitchFamily="34" charset="-122"/>
+                <a:cs typeface="Arial" pitchFamily="34" charset="-120"/>
+              </a:rPr>
+              <a:t>Ajustes de sistema</a:t>
+            </a:r>
+            <a:endParaRPr lang="en-US" sz="1600" dirty="0"/>
+          </a:p>
+        </p:txBody>
+      </p:sp>
+      <p:sp>
+        <p:nvSpPr>
+          <p:cNvPr id="14" name="Text 12"/>
+          <p:cNvSpPr txBox="1"/>
+          <p:nvPr/>
+        </p:nvSpPr>
+        <p:spPr>
+          <a:xfrm>
+            <a:off x="1280160" y="5059680"/>
+            <a:ext cx="10241280" cy="1203960"/>
+          </a:xfrm>
+          <a:prstGeom prst="rect">
+            <a:avLst/>
+          </a:prstGeom>
+          <a:noFill/>
+          <a:ln/>
+        </p:spPr>
+        <p:txBody>
+          <a:bodyPr wrap="square" lIns="0" tIns="0" rIns="0" bIns="0" rtlCol="0" anchor="t"/>
+          <a:lstStyle/>
+          <a:p>
+            <a:pPr indent="0" marL="0">
+              <a:buNone/>
+            </a:pPr>
+            <a:r>
+              <a:rPr lang="en-US" sz="1300" dirty="0">
+                <a:solidFill>
+                  <a:srgbClr val="4A5568"/>
+                </a:solidFill>
+                <a:latin typeface="Arial" pitchFamily="34" charset="0"/>
+                <a:ea typeface="Arial" pitchFamily="34" charset="-122"/>
+                <a:cs typeface="Arial" pitchFamily="34" charset="-120"/>
+              </a:rPr>
+              <a:t>Contraste, tamaño de texto, tiempo de espera configurado.</a:t>
+            </a:r>
+            <a:endParaRPr lang="en-US" sz="1300" dirty="0"/>
+          </a:p>
+        </p:txBody>
+      </p:sp>
+    </p:spTree>
+  </p:cSld>
+  <p:clrMapOvr>
+    <a:masterClrMapping/>
+  </p:clrMapOvr>
+</p:sld>
+</file>
+
+<file path=ppt/slides/slide8.xml><?xml version="1.0" encoding="utf-8"?>
+<p:sld xmlns:a="http://schemas.openxmlformats.org/drawingml/2006/main" xmlns:r="http://schemas.openxmlformats.org/officeDocument/2006/relationships" xmlns:p="http://schemas.openxmlformats.org/presentationml/2006/main">
+  <p:cSld name="Slide 8">
+    <p:bg>
+      <p:bgPr>
+        <a:solidFill>
           <a:srgbClr val="E93456"/>
         </a:solidFill>
       </p:bgPr>
@@ -2820,7 +4533,7 @@
                 <a:ea typeface="Arial" pitchFamily="34" charset="-122"/>
                 <a:cs typeface="Arial" pitchFamily="34" charset="-120"/>
               </a:rPr>
-              <a:t>Lo que valida una persona es su origen: poder señalar qué dato de investigación respalda cada atributo.</a:t>
+              <a:t>Lo que valida una persona es su origen: poder señalar qué dato de investigación respalda cada atributo. El criterio de decisión, incluso usando IA, siempre es tuyo.</a:t>
             </a:r>
             <a:endParaRPr lang="en-US" sz="2400" dirty="0"/>
           </a:p>
